--- a/moodle-enhancement/docs/business/AIRPAY-ACADEMY-2.0-UAT-SHOWCASE-DECK-2026-09-21.pptx
+++ b/moodle-enhancement/docs/business/AIRPAY-ACADEMY-2.0-UAT-SHOWCASE-DECK-2026-09-21.pptx
@@ -3663,7 +3663,7 @@
                 <a:ea typeface="Arial" pitchFamily="34" charset="-122"/>
                 <a:cs typeface="Arial" pitchFamily="34" charset="-120"/>
               </a:rPr>
-              <a:t>Fail-closed gateway with spend ledger and hard caps is built and tested; an unset cap means AI stays off, never unlimited.</a:t>
+              <a:t>Off by default at two independent levels. The central spend ledger and monthly cap live in the gateway, and code now refuses a live call unless gateway metering is routing - so spend cannot escape the meter by configuration mistake.</a:t>
             </a:r>
             <a:endParaRPr lang="en-US" sz="1000" dirty="0"/>
           </a:p>
